--- a/Current Presentation/Spring 2026.pptx
+++ b/Current Presentation/Spring 2026.pptx
@@ -5,7 +5,7 @@
     <p:sldMasterId id="2147483660" r:id="rId1"/>
   </p:sldMasterIdLst>
   <p:notesMasterIdLst>
-    <p:notesMasterId r:id="rId9"/>
+    <p:notesMasterId r:id="rId8"/>
   </p:notesMasterIdLst>
   <p:sldIdLst>
     <p:sldId id="260" r:id="rId2"/>
@@ -13,8 +13,7 @@
     <p:sldId id="262" r:id="rId4"/>
     <p:sldId id="263" r:id="rId5"/>
     <p:sldId id="264" r:id="rId6"/>
-    <p:sldId id="266" r:id="rId7"/>
-    <p:sldId id="265" r:id="rId8"/>
+    <p:sldId id="265" r:id="rId7"/>
   </p:sldIdLst>
   <p:sldSz cx="12192000" cy="6858000"/>
   <p:notesSz cx="6858000" cy="9144000"/>
@@ -123,7 +122,6 @@
             <p14:sldId id="262"/>
             <p14:sldId id="263"/>
             <p14:sldId id="264"/>
-            <p14:sldId id="266"/>
             <p14:sldId id="265"/>
           </p14:sldIdLst>
         </p14:section>
@@ -137,7 +135,7 @@
 <p1510:revInfo xmlns:a="http://schemas.openxmlformats.org/drawingml/2006/main" xmlns:r="http://schemas.openxmlformats.org/officeDocument/2006/relationships" xmlns:p1510="http://schemas.microsoft.com/office/powerpoint/2015/10/main">
   <p1510:revLst>
     <p1510:client id="{6998B00B-2615-DA7F-16DD-BEDBD145F26F}" v="169" dt="2026-06-22T15:38:36.746"/>
-    <p1510:client id="{BA9E5608-3EA5-4EB9-B58B-23EA90833BA8}" v="731" dt="2026-06-22T16:59:33.224"/>
+    <p1510:client id="{BA9E5608-3EA5-4EB9-B58B-23EA90833BA8}" v="2" dt="2026-06-22T16:31:05.899"/>
     <p1510:client id="{ECBCC7A4-2B2E-30B8-636B-1ED04629B37E}" v="53" dt="2026-06-22T16:20:29.604"/>
   </p1510:revLst>
 </p1510:revInfo>
@@ -167,126 +165,6 @@
     </inkml:brush>
   </inkml:definitions>
   <inkml:trace contextRef="#ctx0" brushRef="#br0">0 0 24575,'0'0'-8191</inkml:trace>
-</inkml:ink>
-</file>
-
-<file path=ppt/ink/ink2.xml><?xml version="1.0" encoding="utf-8"?>
-<inkml:ink xmlns:inkml="http://www.w3.org/2003/InkML">
-  <inkml:definitions>
-    <inkml:context xml:id="ctx0">
-      <inkml:inkSource xml:id="inkSrc0">
-        <inkml:traceFormat>
-          <inkml:channel name="X" type="integer" min="-2.14748E9" max="2.14748E9" units="cm"/>
-          <inkml:channel name="Y" type="integer" min="-2.14748E9" max="2.14748E9" units="cm"/>
-          <inkml:channel name="F" type="integer" max="32767" units="dev"/>
-          <inkml:channel name="OA" type="integer" max="360" units="deg"/>
-          <inkml:channel name="OE" type="integer" max="90" units="deg"/>
-        </inkml:traceFormat>
-        <inkml:channelProperties>
-          <inkml:channelProperty channel="X" name="resolution" value="1000" units="1/cm"/>
-          <inkml:channelProperty channel="Y" name="resolution" value="1000" units="1/cm"/>
-          <inkml:channelProperty channel="F" name="resolution" value="0" units="1/dev"/>
-          <inkml:channelProperty channel="OA" name="resolution" value="1000" units="1/deg"/>
-          <inkml:channelProperty channel="OE" name="resolution" value="1000" units="1/deg"/>
-        </inkml:channelProperties>
-      </inkml:inkSource>
-    </inkml:context>
-    <inkml:brush xml:id="br0">
-      <inkml:brushProperty name="width" value="0.1" units="cm"/>
-      <inkml:brushProperty name="height" value="0.1" units="cm"/>
-    </inkml:brush>
-  </inkml:definitions>
-  <inkml:trace contextRef="#ctx0" brushRef="#br0">12415 4842 16383 0 0,'0'8'0'0'0,"0"12"0"0"0,-4 7 0 0 0,-2 3 0 0 0,1 0 0 0 0,1 0 0 0 0,1-1 0 0 0,-4-2 0 0 0,1 0 0 0 0,0-1 0 0 0,1 0 0 0 0,-2 12 0 0 0,0 4 0 0 0,1 8 0 0 0,-3 16 0 0 0,-4 11 0 0 0,0 4 0 0 0,-6 6 0 0 0,0 1 0 0 0,3 3 0 0 0,0-2 0 0 0,3-2 0 0 0,4-9 0 0 0,3-12 0 0 0,2-13 0 0 0,3-12 0 0 0,1-8 0 0 0,-4-2 0 0 0,-1 4 0 0 0,0 3 0 0 0,-7 13 0 0 0,-2 10 0 0 0,1 17 0 0 0,3 12 0 0 0,4 7 0 0 0,2 5 0 0 0,2 2 0 0 0,2 1 0 0 0,0-1 0 0 0,0-9 0 0 0,1-12 0 0 0,-1-17 0 0 0,1-14 0 0 0,-1-12 0 0 0,0-5 0 0 0,0-3 0 0 0,0-3 0 0 0,0 1 0 0 0,0 1 0 0 0,0 8 0 0 0,-4 5 0 0 0,-2 9 0 0 0,-3 12 0 0 0,-1 8 0 0 0,-3 4 0 0 0,1-2 0 0 0,2-5 0 0 0,3-6 0 0 0,3-2 0 0 0,2-6 0 0 0,1-9 0 0 0,1-7 0 0 0,1-3 0 0 0,-1-3 0 0 0,1 1 0 0 0,-1-1 0 0 0,0 2 0 0 0,1 0 0 0 0,-1 2 0 0 0,0-2 0 0 0,0 3 0 0 0,0-2 0 0 0,0 1 0 0 0,0 4 0 0 0,0 2 0 0 0,0-1 0 0 0,0 0 0 0 0,0 1 0 0 0,0 3 0 0 0,0-4 0 0 0,0 0 0 0 0,0-2 0 0 0,0-1 0 0 0,0 2 0 0 0,0-2 0 0 0,0-3 0 0 0,0-4 0 0 0,0-4 0 0 0,0-1 0 0 0,0-2 0 0 0,0-1 0 0 0,0-1 0 0 0,0 5 0 0 0,-5 5 0 0 0,0 2 0 0 0,-1-1 0 0 0,2 2 0 0 0,1-2 0 0 0,-3 3 0 0 0,-1-1 0 0 0,1 2 0 0 0,2-7 0 0 0</inkml:trace>
-</inkml:ink>
-</file>
-
-<file path=ppt/ink/ink3.xml><?xml version="1.0" encoding="utf-8"?>
-<inkml:ink xmlns:inkml="http://www.w3.org/2003/InkML">
-  <inkml:definitions>
-    <inkml:context xml:id="ctx0">
-      <inkml:inkSource xml:id="inkSrc0">
-        <inkml:traceFormat>
-          <inkml:channel name="X" type="integer" min="-2.14748E9" max="2.14748E9" units="cm"/>
-          <inkml:channel name="Y" type="integer" min="-2.14748E9" max="2.14748E9" units="cm"/>
-          <inkml:channel name="F" type="integer" max="32767" units="dev"/>
-          <inkml:channel name="OA" type="integer" max="360" units="deg"/>
-          <inkml:channel name="OE" type="integer" max="90" units="deg"/>
-        </inkml:traceFormat>
-        <inkml:channelProperties>
-          <inkml:channelProperty channel="X" name="resolution" value="1000" units="1/cm"/>
-          <inkml:channelProperty channel="Y" name="resolution" value="1000" units="1/cm"/>
-          <inkml:channelProperty channel="F" name="resolution" value="0" units="1/dev"/>
-          <inkml:channelProperty channel="OA" name="resolution" value="1000" units="1/deg"/>
-          <inkml:channelProperty channel="OE" name="resolution" value="1000" units="1/deg"/>
-        </inkml:channelProperties>
-      </inkml:inkSource>
-    </inkml:context>
-    <inkml:brush xml:id="br0">
-      <inkml:brushProperty name="width" value="0.1" units="cm"/>
-      <inkml:brushProperty name="height" value="0.1" units="cm"/>
-    </inkml:brush>
-  </inkml:definitions>
-  <inkml:trace contextRef="#ctx0" brushRef="#br0">9366 5821 16383 0 0,'9'4'0'0'0,"11"2"0"0"0,15-1 0 0 0,19 4 0 0 0,26 8 0 0 0,20 2 0 0 0,33 2 0 0 0,27-3 0 0 0,21-5 0 0 0,22-4 0 0 0,12-3 0 0 0,2-4 0 0 0,-4-1 0 0 0,-18-1 0 0 0,-25 3 0 0 0,-32 2 0 0 0,-32-1 0 0 0,-25 0 0 0 0,-17-1 0 0 0,9-1 0 0 0,15-1 0 0 0,14-1 0 0 0,14 0 0 0 0,18 0 0 0 0,4 0 0 0 0,-5-1 0 0 0,-21 1 0 0 0,-21 0 0 0 0,-8 0 0 0 0,3 0 0 0 0,-5 0 0 0 0,-3 0 0 0 0,-11 4 0 0 0,-16 2 0 0 0</inkml:trace>
-</inkml:ink>
-</file>
-
-<file path=ppt/ink/ink4.xml><?xml version="1.0" encoding="utf-8"?>
-<inkml:ink xmlns:inkml="http://www.w3.org/2003/InkML">
-  <inkml:definitions>
-    <inkml:context xml:id="ctx0">
-      <inkml:inkSource xml:id="inkSrc0">
-        <inkml:traceFormat>
-          <inkml:channel name="X" type="integer" min="-2.14748E9" max="2.14748E9" units="cm"/>
-          <inkml:channel name="Y" type="integer" min="-2.14748E9" max="2.14748E9" units="cm"/>
-          <inkml:channel name="F" type="integer" max="32767" units="dev"/>
-          <inkml:channel name="OA" type="integer" max="360" units="deg"/>
-          <inkml:channel name="OE" type="integer" max="90" units="deg"/>
-        </inkml:traceFormat>
-        <inkml:channelProperties>
-          <inkml:channelProperty channel="X" name="resolution" value="1000" units="1/cm"/>
-          <inkml:channelProperty channel="Y" name="resolution" value="1000" units="1/cm"/>
-          <inkml:channelProperty channel="F" name="resolution" value="0" units="1/dev"/>
-          <inkml:channelProperty channel="OA" name="resolution" value="1000" units="1/deg"/>
-          <inkml:channelProperty channel="OE" name="resolution" value="1000" units="1/deg"/>
-        </inkml:channelProperties>
-      </inkml:inkSource>
-    </inkml:context>
-    <inkml:brush xml:id="br0">
-      <inkml:brushProperty name="width" value="0.1" units="cm"/>
-      <inkml:brushProperty name="height" value="0.1" units="cm"/>
-    </inkml:brush>
-  </inkml:definitions>
-  <inkml:trace contextRef="#ctx0" brushRef="#br0">15124 4577 16383 0 0,'4'0'0'0'0,"2"9"0"0"0,-1 11 0 0 0,-4 15 0 0 0,-8 19 0 0 0,-11 26 0 0 0,-11 24 0 0 0,0 35 0 0 0,0 22 0 0 0,5 23 0 0 0,7 14 0 0 0,6 4 0 0 0,5 1 0 0 0,3-7 0 0 0,3-17 0 0 0,-8-3 0 0 0,-2-7 0 0 0,1-6 0 0 0,1 12 0 0 0,2 15 0 0 0,3 22 0 0 0,1 18 0 0 0,1 13 0 0 0,1-1 0 0 0,1-7 0 0 0,-1-22 0 0 0,5-22 0 0 0,1-30 0 0 0,0-30 0 0 0,-2-33 0 0 0,-1-16 0 0 0,-1-13 0 0 0,-1-10 0 0 0,-5-2 0 0 0,-1-2 0 0 0,3-28 0 0 0,16-48 0 0 0,14-51 0 0 0,6-34 0 0 0,7-34 0 0 0,3-22 0 0 0,0-6 0 0 0,5 4 0 0 0,-2 14 0 0 0,-8 23 0 0 0,-3 24 0 0 0,-3 22 0 0 0,-7 20 0 0 0,-8 12 0 0 0,-7 6 0 0 0,-1-3 0 0 0,-3-11 0 0 0,7-17 0 0 0,0-13 0 0 0,7-17 0 0 0,4-8 0 0 0,11-16 0 0 0,-1 6 0 0 0,-3 7 0 0 0,3 5 0 0 0,-1 18 0 0 0,3 23 0 0 0,7 25 0 0 0,23 19 0 0 0,29 14 0 0 0,46 30 0 0 0,41 29 0 0 0,33 15 0 0 0,18 10 0 0 0,12 14 0 0 0,-19 0 0 0 0,-39-14 0 0 0,-30-7 0 0 0,-33-10 0 0 0,-35-7 0 0 0,-31 2 0 0 0,-22 1 0 0 0,-18 4 0 0 0,-11 14 0 0 0,-7 30 0 0 0,-5 27 0 0 0,0 27 0 0 0,-1 16 0 0 0,2 19 0 0 0,0-1 0 0 0,2 0 0 0 0,0-9 0 0 0,0-26 0 0 0,1-32 0 0 0,0-27 0 0 0,1-25 0 0 0,-1-16 0 0 0,0-9 0 0 0,-4-11 0 0 0,-2-8 0 0 0,1-3 0 0 0,0-1 0 0 0,2 0 0 0 0,-3 1 0 0 0,-1-4 0 0 0</inkml:trace>
-</inkml:ink>
-</file>
-
-<file path=ppt/ink/ink5.xml><?xml version="1.0" encoding="utf-8"?>
-<inkml:ink xmlns:inkml="http://www.w3.org/2003/InkML">
-  <inkml:definitions>
-    <inkml:context xml:id="ctx0">
-      <inkml:inkSource xml:id="inkSrc0">
-        <inkml:traceFormat>
-          <inkml:channel name="X" type="integer" min="-2.14748E9" max="2.14748E9" units="cm"/>
-          <inkml:channel name="Y" type="integer" min="-2.14748E9" max="2.14748E9" units="cm"/>
-          <inkml:channel name="F" type="integer" max="32767" units="dev"/>
-          <inkml:channel name="OA" type="integer" max="360" units="deg"/>
-          <inkml:channel name="OE" type="integer" max="90" units="deg"/>
-        </inkml:traceFormat>
-        <inkml:channelProperties>
-          <inkml:channelProperty channel="X" name="resolution" value="1000" units="1/cm"/>
-          <inkml:channelProperty channel="Y" name="resolution" value="1000" units="1/cm"/>
-          <inkml:channelProperty channel="F" name="resolution" value="0" units="1/dev"/>
-          <inkml:channelProperty channel="OA" name="resolution" value="1000" units="1/deg"/>
-          <inkml:channelProperty channel="OE" name="resolution" value="1000" units="1/deg"/>
-        </inkml:channelProperties>
-      </inkml:inkSource>
-    </inkml:context>
-    <inkml:brush xml:id="br0">
-      <inkml:brushProperty name="width" value="0.1" units="cm"/>
-      <inkml:brushProperty name="height" value="0.1" units="cm"/>
-    </inkml:brush>
-  </inkml:definitions>
-  <inkml:trace contextRef="#ctx0" brushRef="#br0">19579 8073 16383 0 0,'4'5'0'0'0,"41"9"0"0"0,59 24 0 0 0,67 19 0 0 0,57 8 0 0 0,45 9 0 0 0,23-6 0 0 0,-9-12 0 0 0,-31-15 0 0 0,-43-14 0 0 0,-40-12 0 0 0,-36-9 0 0 0,-34-5 0 0 0,-29-7 0 0 0,-19-2 0 0 0,-6-9 0 0 0,-3-10 0 0 0,4-13 0 0 0,6-17 0 0 0,-2-7 0 0 0,2-6 0 0 0,-8 0 0 0 0,-12 5 0 0 0,-12-1 0 0 0,-11-2 0 0 0,-7 7 0 0 0,-4 1 0 0 0,-3-3 0 0 0,-2 2 0 0 0,-12-3 0 0 0,-17-7 0 0 0,-20-4 0 0 0,-19 2 0 0 0,-26 0 0 0 0,-11 5 0 0 0,1 8 0 0 0,10 16 0 0 0,13 6 0 0 0,8 10 0 0 0,8 9 0 0 0,7 8 0 0 0,1 2 0 0 0,-6 2 0 0 0,-13 3 0 0 0,-16 1 0 0 0,-7 2 0 0 0,-13 1 0 0 0,-17 13 0 0 0,-7 21 0 0 0,3 19 0 0 0,15 8 0 0 0,25 2 0 0 0,24 4 0 0 0,25 7 0 0 0,19 4 0 0 0,11 6 0 0 0,9 6 0 0 0,4 4 0 0 0,0 4 0 0 0,0 11 0 0 0,-3 8 0 0 0,-10 14 0 0 0,-1 20 0 0 0,-2 22 0 0 0,-2 16 0 0 0,2 10 0 0 0,6 6 0 0 0,17 2 0 0 0,30-4 0 0 0,30-7 0 0 0,18-19 0 0 0,17-19 0 0 0,12-18 0 0 0,-3-26 0 0 0,-8-26 0 0 0,-16-21 0 0 0,-13-13 0 0 0,-15-15 0 0 0,-12-6 0 0 0,-9-9 0 0 0,-10-4 0 0 0,-6-5 0 0 0,-1-6 0 0 0,1-3 0 0 0,6-4 0 0 0,3-2 0 0 0,-3 0 0 0 0</inkml:trace>
 </inkml:ink>
 </file>
 
@@ -8439,415 +8317,6 @@
 </file>
 
 <file path=ppt/slides/slide6.xml><?xml version="1.0" encoding="utf-8"?>
-<p:sld xmlns:a="http://schemas.openxmlformats.org/drawingml/2006/main" xmlns:r="http://schemas.openxmlformats.org/officeDocument/2006/relationships" xmlns:p="http://schemas.openxmlformats.org/presentationml/2006/main">
-  <p:cSld>
-    <p:spTree>
-      <p:nvGrpSpPr>
-        <p:cNvPr id="1" name=""/>
-        <p:cNvGrpSpPr/>
-        <p:nvPr/>
-      </p:nvGrpSpPr>
-      <p:grpSpPr>
-        <a:xfrm>
-          <a:off x="0" y="0"/>
-          <a:ext cx="0" cy="0"/>
-          <a:chOff x="0" y="0"/>
-          <a:chExt cx="0" cy="0"/>
-        </a:xfrm>
-      </p:grpSpPr>
-      <mc:AlternateContent xmlns:mc="http://schemas.openxmlformats.org/markup-compatibility/2006">
-        <mc:Choice xmlns:p14="http://schemas.microsoft.com/office/powerpoint/2010/main" Requires="p14">
-          <p:contentPart p14:bwMode="auto" r:id="rId2">
-            <p14:nvContentPartPr>
-              <p14:cNvPr id="4" name="Ink 3">
-                <a:extLst>
-                  <a:ext uri="{FF2B5EF4-FFF2-40B4-BE49-F238E27FC236}">
-                    <a16:creationId xmlns:a16="http://schemas.microsoft.com/office/drawing/2014/main" id="{1EDF980B-B73B-E6F1-BD42-856A30A6BE57}"/>
-                  </a:ext>
-                </a:extLst>
-              </p14:cNvPr>
-              <p14:cNvContentPartPr/>
-              <p14:nvPr/>
-            </p14:nvContentPartPr>
-            <p14:xfrm>
-              <a:off x="2722977" y="1106714"/>
-              <a:ext cx="143593" cy="1788285"/>
-            </p14:xfrm>
-          </p:contentPart>
-        </mc:Choice>
-        <mc:Fallback>
-          <p:pic>
-            <p:nvPicPr>
-              <p:cNvPr id="4" name="Ink 3">
-                <a:extLst>
-                  <a:ext uri="{FF2B5EF4-FFF2-40B4-BE49-F238E27FC236}">
-                    <a16:creationId xmlns:a16="http://schemas.microsoft.com/office/drawing/2014/main" id="{1EDF980B-B73B-E6F1-BD42-856A30A6BE57}"/>
-                  </a:ext>
-                </a:extLst>
-              </p:cNvPr>
-              <p:cNvPicPr/>
-              <p:nvPr/>
-            </p:nvPicPr>
-            <p:blipFill>
-              <a:blip r:embed="rId3"/>
-              <a:stretch>
-                <a:fillRect/>
-              </a:stretch>
-            </p:blipFill>
-            <p:spPr>
-              <a:xfrm>
-                <a:off x="2705387" y="1089076"/>
-                <a:ext cx="179132" cy="1823921"/>
-              </a:xfrm>
-              <a:prstGeom prst="rect">
-                <a:avLst/>
-              </a:prstGeom>
-            </p:spPr>
-          </p:pic>
-        </mc:Fallback>
-      </mc:AlternateContent>
-      <mc:AlternateContent xmlns:mc="http://schemas.openxmlformats.org/markup-compatibility/2006">
-        <mc:Choice xmlns:p14="http://schemas.microsoft.com/office/powerpoint/2010/main" Requires="p14">
-          <p:contentPart p14:bwMode="auto" r:id="rId4">
-            <p14:nvContentPartPr>
-              <p14:cNvPr id="5" name="Ink 4">
-                <a:extLst>
-                  <a:ext uri="{FF2B5EF4-FFF2-40B4-BE49-F238E27FC236}">
-                    <a16:creationId xmlns:a16="http://schemas.microsoft.com/office/drawing/2014/main" id="{757EC4C2-30F1-69FF-4C46-86AF837196B1}"/>
-                  </a:ext>
-                </a:extLst>
-              </p14:cNvPr>
-              <p14:cNvContentPartPr/>
-              <p14:nvPr/>
-            </p14:nvContentPartPr>
-            <p14:xfrm>
-              <a:off x="1814285" y="1442357"/>
-              <a:ext cx="1370258" cy="58012"/>
-            </p14:xfrm>
-          </p:contentPart>
-        </mc:Choice>
-        <mc:Fallback>
-          <p:pic>
-            <p:nvPicPr>
-              <p:cNvPr id="5" name="Ink 4">
-                <a:extLst>
-                  <a:ext uri="{FF2B5EF4-FFF2-40B4-BE49-F238E27FC236}">
-                    <a16:creationId xmlns:a16="http://schemas.microsoft.com/office/drawing/2014/main" id="{757EC4C2-30F1-69FF-4C46-86AF837196B1}"/>
-                  </a:ext>
-                </a:extLst>
-              </p:cNvPr>
-              <p:cNvPicPr/>
-              <p:nvPr/>
-            </p:nvPicPr>
-            <p:blipFill>
-              <a:blip r:embed="rId5"/>
-              <a:stretch>
-                <a:fillRect/>
-              </a:stretch>
-            </p:blipFill>
-            <p:spPr>
-              <a:xfrm>
-                <a:off x="1796288" y="1424810"/>
-                <a:ext cx="1405891" cy="93464"/>
-              </a:xfrm>
-              <a:prstGeom prst="rect">
-                <a:avLst/>
-              </a:prstGeom>
-            </p:spPr>
-          </p:pic>
-        </mc:Fallback>
-      </mc:AlternateContent>
-      <mc:AlternateContent xmlns:mc="http://schemas.openxmlformats.org/markup-compatibility/2006">
-        <mc:Choice xmlns:p14="http://schemas.microsoft.com/office/powerpoint/2010/main" Requires="p14">
-          <p:contentPart p14:bwMode="auto" r:id="rId6">
-            <p14:nvContentPartPr>
-              <p14:cNvPr id="6" name="Ink 5">
-                <a:extLst>
-                  <a:ext uri="{FF2B5EF4-FFF2-40B4-BE49-F238E27FC236}">
-                    <a16:creationId xmlns:a16="http://schemas.microsoft.com/office/drawing/2014/main" id="{AE39F47C-F515-1FC1-718E-2E6AFEA24484}"/>
-                  </a:ext>
-                </a:extLst>
-              </p14:cNvPr>
-              <p14:cNvContentPartPr/>
-              <p14:nvPr/>
-            </p14:nvContentPartPr>
-            <p14:xfrm>
-              <a:off x="3718586" y="1016000"/>
-              <a:ext cx="1051290" cy="1850280"/>
-            </p14:xfrm>
-          </p:contentPart>
-        </mc:Choice>
-        <mc:Fallback>
-          <p:pic>
-            <p:nvPicPr>
-              <p:cNvPr id="6" name="Ink 5">
-                <a:extLst>
-                  <a:ext uri="{FF2B5EF4-FFF2-40B4-BE49-F238E27FC236}">
-                    <a16:creationId xmlns:a16="http://schemas.microsoft.com/office/drawing/2014/main" id="{AE39F47C-F515-1FC1-718E-2E6AFEA24484}"/>
-                  </a:ext>
-                </a:extLst>
-              </p:cNvPr>
-              <p:cNvPicPr/>
-              <p:nvPr/>
-            </p:nvPicPr>
-            <p:blipFill>
-              <a:blip r:embed="rId7"/>
-              <a:stretch>
-                <a:fillRect/>
-              </a:stretch>
-            </p:blipFill>
-            <p:spPr>
-              <a:xfrm>
-                <a:off x="3700591" y="998005"/>
-                <a:ext cx="1086921" cy="1885911"/>
-              </a:xfrm>
-              <a:prstGeom prst="rect">
-                <a:avLst/>
-              </a:prstGeom>
-            </p:spPr>
-          </p:pic>
-        </mc:Fallback>
-      </mc:AlternateContent>
-      <mc:AlternateContent xmlns:mc="http://schemas.openxmlformats.org/markup-compatibility/2006">
-        <mc:Choice xmlns:p14="http://schemas.microsoft.com/office/powerpoint/2010/main" Requires="p14">
-          <p:contentPart p14:bwMode="auto" r:id="rId8">
-            <p14:nvContentPartPr>
-              <p14:cNvPr id="7" name="Ink 6">
-                <a:extLst>
-                  <a:ext uri="{FF2B5EF4-FFF2-40B4-BE49-F238E27FC236}">
-                    <a16:creationId xmlns:a16="http://schemas.microsoft.com/office/drawing/2014/main" id="{6583D680-F220-D034-D2CD-0D5E74C9B384}"/>
-                  </a:ext>
-                </a:extLst>
-              </p14:cNvPr>
-              <p14:cNvContentPartPr/>
-              <p14:nvPr/>
-            </p14:nvContentPartPr>
-            <p14:xfrm>
-              <a:off x="5315857" y="1877021"/>
-              <a:ext cx="1029104" cy="1308800"/>
-            </p14:xfrm>
-          </p:contentPart>
-        </mc:Choice>
-        <mc:Fallback>
-          <p:pic>
-            <p:nvPicPr>
-              <p:cNvPr id="7" name="Ink 6">
-                <a:extLst>
-                  <a:ext uri="{FF2B5EF4-FFF2-40B4-BE49-F238E27FC236}">
-                    <a16:creationId xmlns:a16="http://schemas.microsoft.com/office/drawing/2014/main" id="{6583D680-F220-D034-D2CD-0D5E74C9B384}"/>
-                  </a:ext>
-                </a:extLst>
-              </p:cNvPr>
-              <p:cNvPicPr/>
-              <p:nvPr/>
-            </p:nvPicPr>
-            <p:blipFill>
-              <a:blip r:embed="rId9"/>
-              <a:stretch>
-                <a:fillRect/>
-              </a:stretch>
-            </p:blipFill>
-            <p:spPr>
-              <a:xfrm>
-                <a:off x="5297866" y="1859388"/>
-                <a:ext cx="1064727" cy="1344426"/>
-              </a:xfrm>
-              <a:prstGeom prst="rect">
-                <a:avLst/>
-              </a:prstGeom>
-            </p:spPr>
-          </p:pic>
-        </mc:Fallback>
-      </mc:AlternateContent>
-      <p:sp>
-        <p:nvSpPr>
-          <p:cNvPr id="11" name="TextBox 10">
-            <a:extLst>
-              <a:ext uri="{FF2B5EF4-FFF2-40B4-BE49-F238E27FC236}">
-                <a16:creationId xmlns:a16="http://schemas.microsoft.com/office/drawing/2014/main" id="{B9F7FF27-934F-61E9-623E-28E67F7A95BB}"/>
-              </a:ext>
-            </a:extLst>
-          </p:cNvPr>
-          <p:cNvSpPr txBox="1"/>
-          <p:nvPr/>
-        </p:nvSpPr>
-        <p:spPr>
-          <a:xfrm>
-            <a:off x="952500" y="1605642"/>
-            <a:ext cx="10392937" cy="523220"/>
-          </a:xfrm>
-          <a:prstGeom prst="rect">
-            <a:avLst/>
-          </a:prstGeom>
-          <a:noFill/>
-        </p:spPr>
-        <p:txBody>
-          <a:bodyPr rot="0" spcFirstLastPara="0" vertOverflow="overflow" horzOverflow="overflow" vert="horz" wrap="square" lIns="91440" tIns="45720" rIns="91440" bIns="45720" numCol="1" spcCol="0" rtlCol="0" fromWordArt="0" anchor="t" anchorCtr="0" forceAA="0" compatLnSpc="1">
-            <a:prstTxWarp prst="textNoShape">
-              <a:avLst/>
-            </a:prstTxWarp>
-            <a:spAutoFit/>
-          </a:bodyPr>
-          <a:lstStyle/>
-          <a:p>
-            <a:r>
-              <a:rPr lang="en-US" sz="2800" b="1"/>
-              <a:t>And now, what you have all been waiting impatiently for:</a:t>
-            </a:r>
-          </a:p>
-        </p:txBody>
-      </p:sp>
-      <p:sp>
-        <p:nvSpPr>
-          <p:cNvPr id="16" name="TextBox 15">
-            <a:extLst>
-              <a:ext uri="{FF2B5EF4-FFF2-40B4-BE49-F238E27FC236}">
-                <a16:creationId xmlns:a16="http://schemas.microsoft.com/office/drawing/2014/main" id="{6B24E668-FDBC-2A58-E24B-5AFE69FF43EA}"/>
-              </a:ext>
-            </a:extLst>
-          </p:cNvPr>
-          <p:cNvSpPr txBox="1"/>
-          <p:nvPr/>
-        </p:nvSpPr>
-        <p:spPr>
-          <a:xfrm>
-            <a:off x="2861127" y="2594428"/>
-            <a:ext cx="1378858" cy="369332"/>
-          </a:xfrm>
-          <a:prstGeom prst="rect">
-            <a:avLst/>
-          </a:prstGeom>
-          <a:noFill/>
-        </p:spPr>
-        <p:txBody>
-          <a:bodyPr rot="0" spcFirstLastPara="0" vertOverflow="overflow" horzOverflow="overflow" vert="horz" wrap="square" lIns="91440" tIns="45720" rIns="91440" bIns="45720" numCol="1" spcCol="0" rtlCol="0" fromWordArt="0" anchor="t" anchorCtr="0" forceAA="0" compatLnSpc="1">
-            <a:prstTxWarp prst="textNoShape">
-              <a:avLst/>
-            </a:prstTxWarp>
-            <a:spAutoFit/>
-          </a:bodyPr>
-          <a:lstStyle/>
-          <a:p>
-            <a:r>
-              <a:rPr lang="en-US" dirty="0"/>
-              <a:t>The </a:t>
-            </a:r>
-            <a:r>
-              <a:rPr lang="en-US" dirty="0" err="1"/>
-              <a:t>en</a:t>
-            </a:r>
-            <a:r>
-              <a:rPr lang="en-US" dirty="0"/>
-              <a:t>...</a:t>
-            </a:r>
-          </a:p>
-        </p:txBody>
-      </p:sp>
-      <p:sp>
-        <p:nvSpPr>
-          <p:cNvPr id="17" name="TextBox 16">
-            <a:extLst>
-              <a:ext uri="{FF2B5EF4-FFF2-40B4-BE49-F238E27FC236}">
-                <a16:creationId xmlns:a16="http://schemas.microsoft.com/office/drawing/2014/main" id="{C941C5D6-1C32-1CCA-8A25-4DBCADF7A7AF}"/>
-              </a:ext>
-            </a:extLst>
-          </p:cNvPr>
-          <p:cNvSpPr txBox="1"/>
-          <p:nvPr/>
-        </p:nvSpPr>
-        <p:spPr>
-          <a:xfrm>
-            <a:off x="1560285" y="3432627"/>
-            <a:ext cx="3588655" cy="1200329"/>
-          </a:xfrm>
-          <a:prstGeom prst="rect">
-            <a:avLst/>
-          </a:prstGeom>
-          <a:noFill/>
-        </p:spPr>
-        <p:txBody>
-          <a:bodyPr rot="0" spcFirstLastPara="0" vertOverflow="overflow" horzOverflow="overflow" vert="horz" wrap="square" lIns="91440" tIns="45720" rIns="91440" bIns="45720" numCol="1" spcCol="0" rtlCol="0" fromWordArt="0" anchor="t" anchorCtr="0" forceAA="0" compatLnSpc="1">
-            <a:prstTxWarp prst="textNoShape">
-              <a:avLst/>
-            </a:prstTxWarp>
-            <a:spAutoFit/>
-          </a:bodyPr>
-          <a:lstStyle/>
-          <a:p>
-            <a:r>
-              <a:rPr lang="en-US" dirty="0"/>
-              <a:t>Oh, wait, actually, first, the meaning of Life, The Universe, and Everything is, as we all know, 42</a:t>
-            </a:r>
-          </a:p>
-        </p:txBody>
-      </p:sp>
-      <p:sp>
-        <p:nvSpPr>
-          <p:cNvPr id="18" name="TextBox 17">
-            <a:extLst>
-              <a:ext uri="{FF2B5EF4-FFF2-40B4-BE49-F238E27FC236}">
-                <a16:creationId xmlns:a16="http://schemas.microsoft.com/office/drawing/2014/main" id="{61FE8BD0-21F9-4A30-81A2-C2148D1A885A}"/>
-              </a:ext>
-            </a:extLst>
-          </p:cNvPr>
-          <p:cNvSpPr txBox="1"/>
-          <p:nvPr/>
-        </p:nvSpPr>
-        <p:spPr>
-          <a:xfrm>
-            <a:off x="6105072" y="3428999"/>
-            <a:ext cx="3202212" cy="923330"/>
-          </a:xfrm>
-          <a:prstGeom prst="rect">
-            <a:avLst/>
-          </a:prstGeom>
-          <a:noFill/>
-        </p:spPr>
-        <p:txBody>
-          <a:bodyPr rot="0" spcFirstLastPara="0" vertOverflow="overflow" horzOverflow="overflow" vert="horz" wrap="square" lIns="91440" tIns="45720" rIns="91440" bIns="45720" numCol="1" spcCol="0" rtlCol="0" fromWordArt="0" anchor="t" anchorCtr="0" forceAA="0" compatLnSpc="1">
-            <a:prstTxWarp prst="textNoShape">
-              <a:avLst/>
-            </a:prstTxWarp>
-            <a:spAutoFit/>
-          </a:bodyPr>
-          <a:lstStyle/>
-          <a:p>
-            <a:r>
-              <a:rPr lang="en-US" dirty="0"/>
-              <a:t>So, obviously we don't understand the </a:t>
-            </a:r>
-            <a:r>
-              <a:rPr lang="en-US"/>
-              <a:t>question. </a:t>
-            </a:r>
-          </a:p>
-          <a:p>
-            <a:r>
-              <a:rPr lang="en-US" dirty="0"/>
-              <a:t>Well, I found it. </a:t>
-            </a:r>
-            <a:r>
-              <a:rPr lang="en-US"/>
-              <a:t>It is</a:t>
-            </a:r>
-            <a:endParaRPr lang="en-US" dirty="0"/>
-          </a:p>
-        </p:txBody>
-      </p:sp>
-    </p:spTree>
-    <p:extLst>
-      <p:ext uri="{BB962C8B-B14F-4D97-AF65-F5344CB8AC3E}">
-        <p14:creationId xmlns:p14="http://schemas.microsoft.com/office/powerpoint/2010/main" val="411591964"/>
-      </p:ext>
-    </p:extLst>
-  </p:cSld>
-  <p:clrMapOvr>
-    <a:masterClrMapping/>
-  </p:clrMapOvr>
-</p:sld>
-</file>
-
-<file path=ppt/slides/slide7.xml><?xml version="1.0" encoding="utf-8"?>
 <p:sld xmlns:a="http://schemas.openxmlformats.org/drawingml/2006/main" xmlns:r="http://schemas.openxmlformats.org/officeDocument/2006/relationships" xmlns:p="http://schemas.openxmlformats.org/presentationml/2006/main">
   <p:cSld>
     <p:spTree>
